--- a/docs/03-Slides/ETHAGT14/ETHAGT14-escalabilidade-sistemas-distribuidos.pptx
+++ b/docs/03-Slides/ETHAGT14/ETHAGT14-escalabilidade-sistemas-distribuidos.pptx
@@ -13664,6 +13664,42 @@
         </p:nvSpPr>
         <p:spPr>
           <a:xfrm>
+            <a:off x="274320" y="6035040"/>
+            <a:ext cx="11612880" cy="320040"/>
+          </a:xfrm>
+          <a:prstGeom prst="rect">
+            <a:avLst/>
+          </a:prstGeom>
+          <a:noFill/>
+        </p:spPr>
+        <p:txBody>
+          <a:bodyPr wrap="square">
+            <a:spAutoFit/>
+          </a:bodyPr>
+          <a:lstStyle/>
+          <a:p>
+            <a:pPr algn="l">
+              <a:defRPr sz="900" b="0">
+                <a:solidFill>
+                  <a:srgbClr val="2980B9"/>
+                </a:solidFill>
+                <a:latin typeface="Segoe UI"/>
+              </a:defRPr>
+            </a:pPr>
+            <a:r>
+              <a:t>TTL = Time To Live — tempo de validade</a:t>
+            </a:r>
+          </a:p>
+        </p:txBody>
+      </p:sp>
+      <p:sp>
+        <p:nvSpPr>
+          <p:cNvPr id="8" name="TextBox 7"/>
+          <p:cNvSpPr txBox="1"/>
+          <p:nvPr/>
+        </p:nvSpPr>
+        <p:spPr>
+          <a:xfrm>
             <a:off x="274320" y="6400800"/>
             <a:ext cx="6400800" cy="365760"/>
           </a:xfrm>
@@ -13694,7 +13730,7 @@
       </p:sp>
       <p:sp>
         <p:nvSpPr>
-          <p:cNvPr id="8" name="TextBox 7"/>
+          <p:cNvPr id="9" name="TextBox 8"/>
           <p:cNvSpPr txBox="1"/>
           <p:nvPr/>
         </p:nvSpPr>
@@ -14061,6 +14097,42 @@
         </p:nvSpPr>
         <p:spPr>
           <a:xfrm>
+            <a:off x="274320" y="6035040"/>
+            <a:ext cx="11612880" cy="320040"/>
+          </a:xfrm>
+          <a:prstGeom prst="rect">
+            <a:avLst/>
+          </a:prstGeom>
+          <a:noFill/>
+        </p:spPr>
+        <p:txBody>
+          <a:bodyPr wrap="square">
+            <a:spAutoFit/>
+          </a:bodyPr>
+          <a:lstStyle/>
+          <a:p>
+            <a:pPr algn="l">
+              <a:defRPr sz="900" b="0">
+                <a:solidFill>
+                  <a:srgbClr val="2980B9"/>
+                </a:solidFill>
+                <a:latin typeface="Segoe UI"/>
+              </a:defRPr>
+            </a:pPr>
+            <a:r>
+              <a:t>FinOps = Financial Operations — gestao financeira de custo de agentes  ·  LLM = Large Language Model — Modelo de Linguagem de Grande Escala</a:t>
+            </a:r>
+          </a:p>
+        </p:txBody>
+      </p:sp>
+      <p:sp>
+        <p:nvSpPr>
+          <p:cNvPr id="8" name="TextBox 7"/>
+          <p:cNvSpPr txBox="1"/>
+          <p:nvPr/>
+        </p:nvSpPr>
+        <p:spPr>
+          <a:xfrm>
             <a:off x="274320" y="6400800"/>
             <a:ext cx="6400800" cy="365760"/>
           </a:xfrm>
@@ -14091,7 +14163,7 @@
       </p:sp>
       <p:sp>
         <p:nvSpPr>
-          <p:cNvPr id="8" name="TextBox 7"/>
+          <p:cNvPr id="9" name="TextBox 8"/>
           <p:cNvSpPr txBox="1"/>
           <p:nvPr/>
         </p:nvSpPr>
@@ -14862,6 +14934,42 @@
         </p:nvSpPr>
         <p:spPr>
           <a:xfrm>
+            <a:off x="274320" y="6035040"/>
+            <a:ext cx="11612880" cy="320040"/>
+          </a:xfrm>
+          <a:prstGeom prst="rect">
+            <a:avLst/>
+          </a:prstGeom>
+          <a:noFill/>
+        </p:spPr>
+        <p:txBody>
+          <a:bodyPr wrap="square">
+            <a:spAutoFit/>
+          </a:bodyPr>
+          <a:lstStyle/>
+          <a:p>
+            <a:pPr algn="l">
+              <a:defRPr sz="900" b="0">
+                <a:solidFill>
+                  <a:srgbClr val="2980B9"/>
+                </a:solidFill>
+                <a:latin typeface="Segoe UI"/>
+              </a:defRPr>
+            </a:pPr>
+            <a:r>
+              <a:t>RAG = Retrieval-Augmented Generation — Geracao Aumentada por Recuperacao</a:t>
+            </a:r>
+          </a:p>
+        </p:txBody>
+      </p:sp>
+      <p:sp>
+        <p:nvSpPr>
+          <p:cNvPr id="8" name="TextBox 7"/>
+          <p:cNvSpPr txBox="1"/>
+          <p:nvPr/>
+        </p:nvSpPr>
+        <p:spPr>
+          <a:xfrm>
             <a:off x="274320" y="6400800"/>
             <a:ext cx="6400800" cy="365760"/>
           </a:xfrm>
@@ -14892,7 +15000,7 @@
       </p:sp>
       <p:sp>
         <p:nvSpPr>
-          <p:cNvPr id="8" name="TextBox 7"/>
+          <p:cNvPr id="9" name="TextBox 8"/>
           <p:cNvSpPr txBox="1"/>
           <p:nvPr/>
         </p:nvSpPr>
@@ -18584,6 +18692,42 @@
         </p:nvSpPr>
         <p:spPr>
           <a:xfrm>
+            <a:off x="274320" y="6035040"/>
+            <a:ext cx="11612880" cy="320040"/>
+          </a:xfrm>
+          <a:prstGeom prst="rect">
+            <a:avLst/>
+          </a:prstGeom>
+          <a:noFill/>
+        </p:spPr>
+        <p:txBody>
+          <a:bodyPr wrap="square">
+            <a:spAutoFit/>
+          </a:bodyPr>
+          <a:lstStyle/>
+          <a:p>
+            <a:pPr algn="l">
+              <a:defRPr sz="900" b="0">
+                <a:solidFill>
+                  <a:srgbClr val="2980B9"/>
+                </a:solidFill>
+                <a:latin typeface="Segoe UI"/>
+              </a:defRPr>
+            </a:pPr>
+            <a:r>
+              <a:t>AgentOps = Agent Operations — operacao e monitoramento de agentes em producao  ·  MCP = Model Context Protocol — Protocolo de Contexto de Modelo</a:t>
+            </a:r>
+          </a:p>
+        </p:txBody>
+      </p:sp>
+      <p:sp>
+        <p:nvSpPr>
+          <p:cNvPr id="8" name="TextBox 7"/>
+          <p:cNvSpPr txBox="1"/>
+          <p:nvPr/>
+        </p:nvSpPr>
+        <p:spPr>
+          <a:xfrm>
             <a:off x="274320" y="6400800"/>
             <a:ext cx="6400800" cy="365760"/>
           </a:xfrm>
@@ -18614,7 +18758,7 @@
       </p:sp>
       <p:sp>
         <p:nvSpPr>
-          <p:cNvPr id="8" name="TextBox 7"/>
+          <p:cNvPr id="9" name="TextBox 8"/>
           <p:cNvSpPr txBox="1"/>
           <p:nvPr/>
         </p:nvSpPr>
@@ -38264,6 +38408,42 @@
         </p:nvSpPr>
         <p:spPr>
           <a:xfrm>
+            <a:off x="274320" y="6035040"/>
+            <a:ext cx="11612880" cy="320040"/>
+          </a:xfrm>
+          <a:prstGeom prst="rect">
+            <a:avLst/>
+          </a:prstGeom>
+          <a:noFill/>
+        </p:spPr>
+        <p:txBody>
+          <a:bodyPr wrap="square">
+            <a:spAutoFit/>
+          </a:bodyPr>
+          <a:lstStyle/>
+          <a:p>
+            <a:pPr algn="l">
+              <a:defRPr sz="900" b="0">
+                <a:solidFill>
+                  <a:srgbClr val="2980B9"/>
+                </a:solidFill>
+                <a:latin typeface="Segoe UI"/>
+              </a:defRPr>
+            </a:pPr>
+            <a:r>
+              <a:t>ReAct = Reasoning and Acting — padrao de loop Thought / Action / Observation</a:t>
+            </a:r>
+          </a:p>
+        </p:txBody>
+      </p:sp>
+      <p:sp>
+        <p:nvSpPr>
+          <p:cNvPr id="8" name="TextBox 7"/>
+          <p:cNvSpPr txBox="1"/>
+          <p:nvPr/>
+        </p:nvSpPr>
+        <p:spPr>
+          <a:xfrm>
             <a:off x="274320" y="6400800"/>
             <a:ext cx="6400800" cy="365760"/>
           </a:xfrm>
@@ -38294,7 +38474,7 @@
       </p:sp>
       <p:sp>
         <p:nvSpPr>
-          <p:cNvPr id="8" name="TextBox 7"/>
+          <p:cNvPr id="9" name="TextBox 8"/>
           <p:cNvSpPr txBox="1"/>
           <p:nvPr/>
         </p:nvSpPr>
@@ -38703,6 +38883,42 @@
         </p:nvSpPr>
         <p:spPr>
           <a:xfrm>
+            <a:off x="274320" y="6035040"/>
+            <a:ext cx="11612880" cy="320040"/>
+          </a:xfrm>
+          <a:prstGeom prst="rect">
+            <a:avLst/>
+          </a:prstGeom>
+          <a:noFill/>
+        </p:spPr>
+        <p:txBody>
+          <a:bodyPr wrap="square">
+            <a:spAutoFit/>
+          </a:bodyPr>
+          <a:lstStyle/>
+          <a:p>
+            <a:pPr algn="l">
+              <a:defRPr sz="900" b="0">
+                <a:solidFill>
+                  <a:srgbClr val="2980B9"/>
+                </a:solidFill>
+                <a:latin typeface="Segoe UI"/>
+              </a:defRPr>
+            </a:pPr>
+            <a:r>
+              <a:t>KV = Key-Value — chave-valor</a:t>
+            </a:r>
+          </a:p>
+        </p:txBody>
+      </p:sp>
+      <p:sp>
+        <p:nvSpPr>
+          <p:cNvPr id="8" name="TextBox 7"/>
+          <p:cNvSpPr txBox="1"/>
+          <p:nvPr/>
+        </p:nvSpPr>
+        <p:spPr>
+          <a:xfrm>
             <a:off x="274320" y="6400800"/>
             <a:ext cx="6400800" cy="365760"/>
           </a:xfrm>
@@ -38733,7 +38949,7 @@
       </p:sp>
       <p:sp>
         <p:nvSpPr>
-          <p:cNvPr id="8" name="TextBox 7"/>
+          <p:cNvPr id="9" name="TextBox 8"/>
           <p:cNvSpPr txBox="1"/>
           <p:nvPr/>
         </p:nvSpPr>
